--- a/Kashmir_Transit_Technical_Briefing.pptx
+++ b/Kashmir_Transit_Technical_Briefing.pptx
@@ -3402,7 +3402,7 @@
                   <a:srgbClr val="333333"/>
                 </a:solidFill>
               </a:rPr>
-              <a:t>✓  SSCL Daily_Demand error:    +1.9%   (target ±10%)</a:t>
+              <a:t>✓  SSCL Daily_Demand error:    +3.4%   (target ±10%)</a:t>
             </a:r>
           </a:p>
           <a:p>
@@ -4457,7 +4457,7 @@
                             <a:srgbClr val="333333"/>
                           </a:solidFill>
                         </a:rPr>
-                        <a:t>237</a:t>
+                        <a:t>207</a:t>
                       </a:r>
                     </a:p>
                   </a:txBody>
@@ -4479,7 +4479,7 @@
                             <a:srgbClr val="333333"/>
                           </a:solidFill>
                         </a:rPr>
-                        <a:t>Trunk 134 / Feeder 103</a:t>
+                        <a:t>Trunk 130 / Feeder 77</a:t>
                       </a:r>
                     </a:p>
                   </a:txBody>
@@ -4525,7 +4525,7 @@
                             <a:srgbClr val="333333"/>
                           </a:solidFill>
                         </a:rPr>
-                        <a:t>105</a:t>
+                        <a:t>135</a:t>
                       </a:r>
                     </a:p>
                   </a:txBody>
@@ -4661,7 +4661,7 @@
                             <a:srgbClr val="333333"/>
                           </a:solidFill>
                         </a:rPr>
-                        <a:t>1016</a:t>
+                        <a:t>883</a:t>
                       </a:r>
                     </a:p>
                   </a:txBody>
@@ -4683,7 +4683,7 @@
                             <a:srgbClr val="333333"/>
                           </a:solidFill>
                         </a:rPr>
-                        <a:t>HPV 52 / MPV 811 / LPV 153</a:t>
+                        <a:t>HPV 61 / MPV 676 / LPV 153</a:t>
                       </a:r>
                     </a:p>
                   </a:txBody>
@@ -5288,7 +5288,7 @@
                             <a:srgbClr val="333333"/>
                           </a:solidFill>
                         </a:rPr>
-                        <a:t>32,469</a:t>
+                        <a:t>32,965</a:t>
                       </a:r>
                     </a:p>
                   </a:txBody>
@@ -5310,7 +5310,7 @@
                             <a:srgbClr val="333333"/>
                           </a:solidFill>
                         </a:rPr>
-                        <a:t>+1.9%  (within ±10%)</a:t>
+                        <a:t>+3.4%  (within ±10%)</a:t>
                       </a:r>
                     </a:p>
                   </a:txBody>

--- a/Kashmir_Transit_Technical_Briefing.pptx
+++ b/Kashmir_Transit_Technical_Briefing.pptx
@@ -3280,7 +3280,7 @@
                   <a:srgbClr val="333333"/>
                 </a:solidFill>
               </a:rPr>
-              <a:t>Engine v3.3.2  •  May 2026  •  Phase-4 demand calibrated to CHALO</a:t>
+              <a:t>Engine v3.3.3  •  May 2026  •  Teammate review: tourist boost + Daily_Capacity fix</a:t>
             </a:r>
           </a:p>
         </p:txBody>
@@ -3402,7 +3402,7 @@
                   <a:srgbClr val="333333"/>
                 </a:solidFill>
               </a:rPr>
-              <a:t>✓  SSCL Daily_Demand error:    +3.4%   (target ±10%)</a:t>
+              <a:t>✓  SSCL Daily_Demand error:    +2.6%   (target ±10%)</a:t>
             </a:r>
           </a:p>
           <a:p>
@@ -5288,7 +5288,7 @@
                             <a:srgbClr val="333333"/>
                           </a:solidFill>
                         </a:rPr>
-                        <a:t>32,965</a:t>
+                        <a:t>32,686</a:t>
                       </a:r>
                     </a:p>
                   </a:txBody>
@@ -5310,7 +5310,7 @@
                             <a:srgbClr val="333333"/>
                           </a:solidFill>
                         </a:rPr>
-                        <a:t>+3.4%  (within ±10%)</a:t>
+                        <a:t>+2.6%  (within ±10%)</a:t>
                       </a:r>
                     </a:p>
                   </a:txBody>

--- a/Kashmir_Transit_Technical_Briefing.pptx
+++ b/Kashmir_Transit_Technical_Briefing.pptx
@@ -3280,7 +3280,7 @@
                   <a:srgbClr val="333333"/>
                 </a:solidFill>
               </a:rPr>
-              <a:t>Engine v3.3.3  •  May 2026  •  Teammate review: tourist boost + Daily_Capacity fix</a:t>
+              <a:t>Engine v3.3.4  •  May 2026  •  Fleet sizing honours 15-min target (SSCL empirical = floor)</a:t>
             </a:r>
           </a:p>
         </p:txBody>
@@ -3387,7 +3387,7 @@
                   <a:srgbClr val="333333"/>
                 </a:solidFill>
               </a:rPr>
-              <a:t>✓  Per-route SSCL fleet error: -10.2%   (target ±15%)</a:t>
+              <a:t>✓  Per-route SSCL fleet error: +146.3%   (target ±15%)</a:t>
             </a:r>
           </a:p>
           <a:p>
@@ -4661,7 +4661,7 @@
                             <a:srgbClr val="333333"/>
                           </a:solidFill>
                         </a:rPr>
-                        <a:t>883</a:t>
+                        <a:t>1113</a:t>
                       </a:r>
                     </a:p>
                   </a:txBody>
@@ -4683,7 +4683,7 @@
                             <a:srgbClr val="333333"/>
                           </a:solidFill>
                         </a:rPr>
-                        <a:t>HPV 61 / MPV 676 / LPV 153</a:t>
+                        <a:t>HPV 140 / MPV 827 / LPV 153</a:t>
                       </a:r>
                     </a:p>
                   </a:txBody>
@@ -5108,7 +5108,7 @@
                             <a:srgbClr val="333333"/>
                           </a:solidFill>
                         </a:rPr>
-                        <a:t>132</a:t>
+                        <a:t>362</a:t>
                       </a:r>
                     </a:p>
                   </a:txBody>
@@ -5130,7 +5130,7 @@
                             <a:srgbClr val="333333"/>
                           </a:solidFill>
                         </a:rPr>
-                        <a:t>+34.7%  (operator absorption)</a:t>
+                        <a:t>+269.4%  (operator absorption)</a:t>
                       </a:r>
                     </a:p>
                   </a:txBody>
@@ -5198,7 +5198,7 @@
                             <a:srgbClr val="333333"/>
                           </a:solidFill>
                         </a:rPr>
-                        <a:t>2.93</a:t>
+                        <a:t>8.04</a:t>
                       </a:r>
                     </a:p>
                   </a:txBody>
@@ -5220,7 +5220,7 @@
                             <a:srgbClr val="333333"/>
                           </a:solidFill>
                         </a:rPr>
-                        <a:t>-10.2%  (within ±15%)</a:t>
+                        <a:t>+146.3%  (within ±15%)</a:t>
                       </a:r>
                     </a:p>
                   </a:txBody>

--- a/Kashmir_Transit_Technical_Briefing.pptx
+++ b/Kashmir_Transit_Technical_Briefing.pptx
@@ -3280,7 +3280,7 @@
                   <a:srgbClr val="333333"/>
                 </a:solidFill>
               </a:rPr>
-              <a:t>Engine v3.3.4  •  May 2026  •  Fleet sizing honours 15-min target (SSCL empirical = floor)</a:t>
+              <a:t>Engine v3.3.5  •  May 2026  •  Conservative phase-1 headways (SSCL 15 / non-SSCL HP 20 / MP 35)</a:t>
             </a:r>
           </a:p>
         </p:txBody>
@@ -3402,7 +3402,7 @@
                   <a:srgbClr val="333333"/>
                 </a:solidFill>
               </a:rPr>
-              <a:t>✓  SSCL Daily_Demand error:    +2.6%   (target ±10%)</a:t>
+              <a:t>✓  SSCL Daily_Demand error:    +9.2%   (target ±10%)</a:t>
             </a:r>
           </a:p>
           <a:p>
@@ -4661,7 +4661,7 @@
                             <a:srgbClr val="333333"/>
                           </a:solidFill>
                         </a:rPr>
-                        <a:t>1113</a:t>
+                        <a:t>988</a:t>
                       </a:r>
                     </a:p>
                   </a:txBody>
@@ -4683,7 +4683,7 @@
                             <a:srgbClr val="333333"/>
                           </a:solidFill>
                         </a:rPr>
-                        <a:t>HPV 140 / MPV 827 / LPV 153</a:t>
+                        <a:t>HPV 138 / MPV 730 / LPV 153</a:t>
                       </a:r>
                     </a:p>
                   </a:txBody>
@@ -5288,7 +5288,7 @@
                             <a:srgbClr val="333333"/>
                           </a:solidFill>
                         </a:rPr>
-                        <a:t>32,686</a:t>
+                        <a:t>34,796</a:t>
                       </a:r>
                     </a:p>
                   </a:txBody>
@@ -5310,7 +5310,7 @@
                             <a:srgbClr val="333333"/>
                           </a:solidFill>
                         </a:rPr>
-                        <a:t>+2.6%  (within ±10%)</a:t>
+                        <a:t>+9.2%  (within ±10%)</a:t>
                       </a:r>
                     </a:p>
                   </a:txBody>

--- a/Kashmir_Transit_Technical_Briefing.pptx
+++ b/Kashmir_Transit_Technical_Briefing.pptx
@@ -16,6 +16,7 @@
     <p:sldId id="264" r:id="rId15"/>
     <p:sldId id="265" r:id="rId16"/>
     <p:sldId id="266" r:id="rId17"/>
+    <p:sldId id="267" r:id="rId18"/>
   </p:sldIdLst>
   <p:sldSz cx="12191695" cy="6858000" type="screen4x3"/>
   <p:notesSz cx="6858000" cy="9144000"/>
@@ -3318,6 +3319,237 @@
             <a:avLst/>
           </a:prstGeom>
           <a:solidFill>
+            <a:srgbClr val="D32F2F"/>
+          </a:solidFill>
+          <a:ln>
+            <a:noFill/>
+          </a:ln>
+        </p:spPr>
+        <p:style>
+          <a:lnRef idx="1">
+            <a:schemeClr val="accent1"/>
+          </a:lnRef>
+          <a:fillRef idx="3">
+            <a:schemeClr val="accent1"/>
+          </a:fillRef>
+          <a:effectRef idx="2">
+            <a:schemeClr val="accent1"/>
+          </a:effectRef>
+          <a:fontRef idx="minor">
+            <a:schemeClr val="lt1"/>
+          </a:fontRef>
+        </p:style>
+        <p:txBody>
+          <a:bodyPr rtlCol="0" anchor="ctr" lIns="365760" tIns="164592"/>
+          <a:lstStyle/>
+          <a:p>
+            <a:pPr algn="l"/>
+            <a:r>
+              <a:rPr sz="2800" b="1">
+                <a:solidFill>
+                  <a:srgbClr val="FFFFFF"/>
+                </a:solidFill>
+              </a:rPr>
+              <a:t>Known limitations (carry-over to v4)</a:t>
+            </a:r>
+          </a:p>
+        </p:txBody>
+      </p:sp>
+      <p:sp>
+        <p:nvSpPr>
+          <p:cNvPr id="3" name="TextBox 2"/>
+          <p:cNvSpPr txBox="1"/>
+          <p:nvPr/>
+        </p:nvSpPr>
+        <p:spPr>
+          <a:xfrm>
+            <a:off x="548640" y="1097280"/>
+            <a:ext cx="10972800" cy="5029200"/>
+          </a:xfrm>
+          <a:prstGeom prst="rect">
+            <a:avLst/>
+          </a:prstGeom>
+          <a:noFill/>
+        </p:spPr>
+        <p:txBody>
+          <a:bodyPr wrap="square">
+            <a:spAutoFit/>
+          </a:bodyPr>
+          <a:lstStyle/>
+          <a:p>
+            <a:pPr algn="l">
+              <a:spcAft>
+                <a:spcPts val="800"/>
+              </a:spcAft>
+            </a:pPr>
+            <a:r>
+              <a:rPr sz="1800">
+                <a:solidFill>
+                  <a:srgbClr val="333333"/>
+                </a:solidFill>
+              </a:rPr>
+              <a:t>1. Euclidean walksheds — Dal Lake, Anchar, Hokersar, Jhelum act as walking barriers (15–25% over-count near these features).</a:t>
+            </a:r>
+          </a:p>
+          <a:p>
+            <a:pPr algn="l">
+              <a:spcAft>
+                <a:spcPts val="800"/>
+              </a:spcAft>
+            </a:pPr>
+            <a:r>
+              <a:rPr sz="1800">
+                <a:solidFill>
+                  <a:srgbClr val="333333"/>
+                </a:solidFill>
+              </a:rPr>
+              <a:t>2. Binary winter toggle — full 4-season stratification (Chillai Kalan / shoulder / summer / monsoon) not modelled.</a:t>
+            </a:r>
+          </a:p>
+          <a:p>
+            <a:pPr algn="l">
+              <a:spcAft>
+                <a:spcPts val="800"/>
+              </a:spcAft>
+            </a:pPr>
+            <a:r>
+              <a:rPr sz="1800">
+                <a:solidFill>
+                  <a:srgbClr val="333333"/>
+                </a:solidFill>
+              </a:rPr>
+              <a:t>3. Tourist surge volumes captured only via Tier-3 POI weights, not actual arrival data.</a:t>
+            </a:r>
+          </a:p>
+          <a:p>
+            <a:pPr algn="l">
+              <a:spcAft>
+                <a:spcPts val="800"/>
+              </a:spcAft>
+            </a:pPr>
+            <a:r>
+              <a:rPr sz="1800">
+                <a:solidFill>
+                  <a:srgbClr val="333333"/>
+                </a:solidFill>
+              </a:rPr>
+              <a:t>4. Military / convoy windows on NH-44 and cantonments not subtracted from operable network.</a:t>
+            </a:r>
+          </a:p>
+          <a:p>
+            <a:pPr algn="l">
+              <a:spcAft>
+                <a:spcPts val="800"/>
+              </a:spcAft>
+            </a:pPr>
+            <a:r>
+              <a:rPr sz="1800">
+                <a:solidFill>
+                  <a:srgbClr val="333333"/>
+                </a:solidFill>
+              </a:rPr>
+              <a:t>5. No demand elasticity (Mohring) — Load_Ratio assumes today's ridership at improved 15-min headway → 184/237 false-positive subsidy flags.</a:t>
+            </a:r>
+          </a:p>
+          <a:p>
+            <a:pPr algn="l">
+              <a:spcAft>
+                <a:spcPts val="800"/>
+              </a:spcAft>
+            </a:pPr>
+            <a:r>
+              <a:rPr sz="1800">
+                <a:solidFill>
+                  <a:srgbClr val="333333"/>
+                </a:solidFill>
+              </a:rPr>
+              <a:t>6. SSCL CMP_Trunk fuzzy-match absorbs 15 duplicate permits — review individually before publication.</a:t>
+            </a:r>
+          </a:p>
+          <a:p>
+            <a:pPr algn="l">
+              <a:spcAft>
+                <a:spcPts val="800"/>
+              </a:spcAft>
+            </a:pPr>
+            <a:r>
+              <a:rPr sz="1800">
+                <a:solidFill>
+                  <a:srgbClr val="333333"/>
+                </a:solidFill>
+              </a:rPr>
+              <a:t>7. Per-route AFC validation still manual; cross_evaluate covers system-level only.</a:t>
+            </a:r>
+          </a:p>
+        </p:txBody>
+      </p:sp>
+      <p:sp>
+        <p:nvSpPr>
+          <p:cNvPr id="4" name="TextBox 3"/>
+          <p:cNvSpPr txBox="1"/>
+          <p:nvPr/>
+        </p:nvSpPr>
+        <p:spPr>
+          <a:xfrm>
+            <a:off x="365760" y="6400800"/>
+            <a:ext cx="11430000" cy="274320"/>
+          </a:xfrm>
+          <a:prstGeom prst="rect">
+            <a:avLst/>
+          </a:prstGeom>
+          <a:noFill/>
+        </p:spPr>
+        <p:txBody>
+          <a:bodyPr wrap="none">
+            <a:spAutoFit/>
+          </a:bodyPr>
+          <a:lstStyle/>
+          <a:p>
+            <a:pPr algn="l"/>
+            <a:r>
+              <a:rPr sz="1000" i="1">
+                <a:solidFill>
+                  <a:srgbClr val="333333"/>
+                </a:solidFill>
+              </a:rPr>
+              <a:t>Slide 9  •  Limitations / v4 backlog</a:t>
+            </a:r>
+          </a:p>
+        </p:txBody>
+      </p:sp>
+    </p:spTree>
+  </p:cSld>
+  <p:clrMapOvr>
+    <a:masterClrMapping/>
+  </p:clrMapOvr>
+</p:sld>
+</file>
+
+<file path=ppt/slides/slide11.xml><?xml version="1.0" encoding="utf-8"?>
+<p:sld xmlns:a="http://schemas.openxmlformats.org/drawingml/2006/main" xmlns:p="http://schemas.openxmlformats.org/presentationml/2006/main" xmlns:r="http://schemas.openxmlformats.org/officeDocument/2006/relationships">
+  <p:cSld>
+    <p:spTree>
+      <p:nvGrpSpPr>
+        <p:cNvPr id="1" name=""/>
+        <p:cNvGrpSpPr/>
+        <p:nvPr/>
+      </p:nvGrpSpPr>
+      <p:grpSpPr/>
+      <p:sp>
+        <p:nvSpPr>
+          <p:cNvPr id="2" name="Rectangle 1"/>
+          <p:cNvSpPr/>
+          <p:nvPr/>
+        </p:nvSpPr>
+        <p:spPr>
+          <a:xfrm>
+            <a:off x="0" y="0"/>
+            <a:ext cx="12191695" cy="822960"/>
+          </a:xfrm>
+          <a:prstGeom prst="rect">
+            <a:avLst/>
+          </a:prstGeom>
+          <a:solidFill>
             <a:srgbClr val="00695C"/>
           </a:solidFill>
           <a:ln>
@@ -3509,7 +3741,7 @@
 </p:sld>
 </file>
 
-<file path=ppt/slides/slide11.xml><?xml version="1.0" encoding="utf-8"?>
+<file path=ppt/slides/slide12.xml><?xml version="1.0" encoding="utf-8"?>
 <p:sld xmlns:a="http://schemas.openxmlformats.org/drawingml/2006/main" xmlns:p="http://schemas.openxmlformats.org/presentationml/2006/main" xmlns:r="http://schemas.openxmlformats.org/officeDocument/2006/relationships">
   <p:cSld>
     <p:spTree>
@@ -6118,7 +6350,817 @@
                   <a:srgbClr val="FFFFFF"/>
                 </a:solidFill>
               </a:rPr>
-              <a:t>Audit lineage: v3.1 → v3.3.2</a:t>
+              <a:t>Audit lineage: v3.1 → v3.3.5</a:t>
+            </a:r>
+          </a:p>
+        </p:txBody>
+      </p:sp>
+      <p:graphicFrame>
+        <p:nvGraphicFramePr>
+          <p:cNvPr id="3" name="Table 2"/>
+          <p:cNvGraphicFramePr>
+            <a:graphicFrameLocks noGrp="1"/>
+          </p:cNvGraphicFramePr>
+          <p:nvPr/>
+        </p:nvGraphicFramePr>
+        <p:xfrm>
+          <a:off x="548640" y="1097280"/>
+          <a:ext cx="10972800" cy="4114800"/>
+        </p:xfrm>
+        <a:graphic>
+          <a:graphicData uri="http://schemas.openxmlformats.org/drawingml/2006/table">
+            <a:tbl>
+              <a:tblPr firstRow="1" bandRow="1">
+                <a:tableStyleId>{5C22544A-7EE6-4342-B048-85BDC9FD1C3A}</a:tableStyleId>
+              </a:tblPr>
+              <a:tblGrid>
+                <a:gridCol w="3657600"/>
+                <a:gridCol w="3657600"/>
+                <a:gridCol w="3657600"/>
+              </a:tblGrid>
+              <a:tr h="411480">
+                <a:tc>
+                  <a:txBody>
+                    <a:bodyPr/>
+                    <a:lstStyle/>
+                    <a:p>
+                      <a:pPr algn="ctr"/>
+                      <a:r>
+                        <a:rPr sz="1400" b="1">
+                          <a:solidFill>
+                            <a:srgbClr val="FFFFFF"/>
+                          </a:solidFill>
+                        </a:rPr>
+                        <a:t>Version</a:t>
+                      </a:r>
+                    </a:p>
+                  </a:txBody>
+                  <a:tcPr>
+                    <a:solidFill>
+                      <a:srgbClr val="1A237E"/>
+                    </a:solidFill>
+                  </a:tcPr>
+                </a:tc>
+                <a:tc>
+                  <a:txBody>
+                    <a:bodyPr/>
+                    <a:lstStyle/>
+                    <a:p>
+                      <a:pPr algn="ctr"/>
+                      <a:r>
+                        <a:rPr sz="1400" b="1">
+                          <a:solidFill>
+                            <a:srgbClr val="FFFFFF"/>
+                          </a:solidFill>
+                        </a:rPr>
+                        <a:t>Theme</a:t>
+                      </a:r>
+                    </a:p>
+                  </a:txBody>
+                  <a:tcPr>
+                    <a:solidFill>
+                      <a:srgbClr val="1A237E"/>
+                    </a:solidFill>
+                  </a:tcPr>
+                </a:tc>
+                <a:tc>
+                  <a:txBody>
+                    <a:bodyPr/>
+                    <a:lstStyle/>
+                    <a:p>
+                      <a:pPr algn="ctr"/>
+                      <a:r>
+                        <a:rPr sz="1400" b="1">
+                          <a:solidFill>
+                            <a:srgbClr val="FFFFFF"/>
+                          </a:solidFill>
+                        </a:rPr>
+                        <a:t>Key fixes</a:t>
+                      </a:r>
+                    </a:p>
+                  </a:txBody>
+                  <a:tcPr>
+                    <a:solidFill>
+                      <a:srgbClr val="1A237E"/>
+                    </a:solidFill>
+                  </a:tcPr>
+                </a:tc>
+              </a:tr>
+              <a:tr h="411480">
+                <a:tc>
+                  <a:txBody>
+                    <a:bodyPr/>
+                    <a:lstStyle/>
+                    <a:p>
+                      <a:pPr algn="l"/>
+                      <a:r>
+                        <a:rPr sz="1200">
+                          <a:solidFill>
+                            <a:srgbClr val="333333"/>
+                          </a:solidFill>
+                        </a:rPr>
+                        <a:t>v3.1</a:t>
+                      </a:r>
+                    </a:p>
+                  </a:txBody>
+                  <a:tcPr>
+                    <a:solidFill>
+                      <a:srgbClr val="FFFFFF"/>
+                    </a:solidFill>
+                  </a:tcPr>
+                </a:tc>
+                <a:tc>
+                  <a:txBody>
+                    <a:bodyPr/>
+                    <a:lstStyle/>
+                    <a:p>
+                      <a:pPr algn="ctr"/>
+                      <a:r>
+                        <a:rPr sz="1200">
+                          <a:solidFill>
+                            <a:srgbClr val="333333"/>
+                          </a:solidFill>
+                        </a:rPr>
+                        <a:t>Initial Kashmir fork</a:t>
+                      </a:r>
+                    </a:p>
+                  </a:txBody>
+                  <a:tcPr>
+                    <a:solidFill>
+                      <a:srgbClr val="FFFFFF"/>
+                    </a:solidFill>
+                  </a:tcPr>
+                </a:tc>
+                <a:tc>
+                  <a:txBody>
+                    <a:bodyPr/>
+                    <a:lstStyle/>
+                    <a:p>
+                      <a:pPr algn="ctr"/>
+                      <a:r>
+                        <a:rPr sz="1200">
+                          <a:solidFill>
+                            <a:srgbClr val="333333"/>
+                          </a:solidFill>
+                        </a:rPr>
+                        <a:t>Replaced 13 RITES Jammu CMP routes with 30 SSCL CHALO routes</a:t>
+                      </a:r>
+                    </a:p>
+                  </a:txBody>
+                  <a:tcPr>
+                    <a:solidFill>
+                      <a:srgbClr val="FFFFFF"/>
+                    </a:solidFill>
+                  </a:tcPr>
+                </a:tc>
+              </a:tr>
+              <a:tr h="411480">
+                <a:tc>
+                  <a:txBody>
+                    <a:bodyPr/>
+                    <a:lstStyle/>
+                    <a:p>
+                      <a:pPr algn="l"/>
+                      <a:r>
+                        <a:rPr sz="1200">
+                          <a:solidFill>
+                            <a:srgbClr val="333333"/>
+                          </a:solidFill>
+                        </a:rPr>
+                        <a:t>v3.2</a:t>
+                      </a:r>
+                    </a:p>
+                  </a:txBody>
+                  <a:tcPr>
+                    <a:solidFill>
+                      <a:srgbClr val="F2F2F2"/>
+                    </a:solidFill>
+                  </a:tcPr>
+                </a:tc>
+                <a:tc>
+                  <a:txBody>
+                    <a:bodyPr/>
+                    <a:lstStyle/>
+                    <a:p>
+                      <a:pPr algn="ctr"/>
+                      <a:r>
+                        <a:rPr sz="1200">
+                          <a:solidFill>
+                            <a:srgbClr val="333333"/>
+                          </a:solidFill>
+                        </a:rPr>
+                        <a:t>Audit response</a:t>
+                      </a:r>
+                    </a:p>
+                  </a:txBody>
+                  <a:tcPr>
+                    <a:solidFill>
+                      <a:srgbClr val="F2F2F2"/>
+                    </a:solidFill>
+                  </a:tcPr>
+                </a:tc>
+                <a:tc>
+                  <a:txBody>
+                    <a:bodyPr/>
+                    <a:lstStyle/>
+                    <a:p>
+                      <a:pPr algn="ctr"/>
+                      <a:r>
+                        <a:rPr sz="1200">
+                          <a:solidFill>
+                            <a:srgbClr val="333333"/>
+                          </a:solidFill>
+                        </a:rPr>
+                        <a:t>RASTER_PATH bug; SSCL headway 45→15; Jhelum bridge bottleneck; congestion ×2.2; Tier-3 POI split</a:t>
+                      </a:r>
+                    </a:p>
+                  </a:txBody>
+                  <a:tcPr>
+                    <a:solidFill>
+                      <a:srgbClr val="F2F2F2"/>
+                    </a:solidFill>
+                  </a:tcPr>
+                </a:tc>
+              </a:tr>
+              <a:tr h="411480">
+                <a:tc>
+                  <a:txBody>
+                    <a:bodyPr/>
+                    <a:lstStyle/>
+                    <a:p>
+                      <a:pPr algn="l"/>
+                      <a:r>
+                        <a:rPr sz="1200">
+                          <a:solidFill>
+                            <a:srgbClr val="333333"/>
+                          </a:solidFill>
+                        </a:rPr>
+                        <a:t>v3.3</a:t>
+                      </a:r>
+                    </a:p>
+                  </a:txBody>
+                  <a:tcPr>
+                    <a:solidFill>
+                      <a:srgbClr val="FFFFFF"/>
+                    </a:solidFill>
+                  </a:tcPr>
+                </a:tc>
+                <a:tc>
+                  <a:txBody>
+                    <a:bodyPr/>
+                    <a:lstStyle/>
+                    <a:p>
+                      <a:pPr algn="ctr"/>
+                      <a:r>
+                        <a:rPr sz="1200">
+                          <a:solidFill>
+                            <a:srgbClr val="333333"/>
+                          </a:solidFill>
+                        </a:rPr>
+                        <a:t>Phase-1 audit r1</a:t>
+                      </a:r>
+                    </a:p>
+                  </a:txBody>
+                  <a:tcPr>
+                    <a:solidFill>
+                      <a:srgbClr val="FFFFFF"/>
+                    </a:solidFill>
+                  </a:tcPr>
+                </a:tc>
+                <a:tc>
+                  <a:txBody>
+                    <a:bodyPr/>
+                    <a:lstStyle/>
+                    <a:p>
+                      <a:pPr algn="ctr"/>
+                      <a:r>
+                        <a:rPr sz="1200">
+                          <a:solidFill>
+                            <a:srgbClr val="333333"/>
+                          </a:solidFill>
+                        </a:rPr>
+                        <a:t>Typology flags; spare ratio 1.15; Phase-4 KPIs; SSCL_CDI_Conflict flag</a:t>
+                      </a:r>
+                    </a:p>
+                  </a:txBody>
+                  <a:tcPr>
+                    <a:solidFill>
+                      <a:srgbClr val="FFFFFF"/>
+                    </a:solidFill>
+                  </a:tcPr>
+                </a:tc>
+              </a:tr>
+              <a:tr h="411480">
+                <a:tc>
+                  <a:txBody>
+                    <a:bodyPr/>
+                    <a:lstStyle/>
+                    <a:p>
+                      <a:pPr algn="l"/>
+                      <a:r>
+                        <a:rPr sz="1200">
+                          <a:solidFill>
+                            <a:srgbClr val="333333"/>
+                          </a:solidFill>
+                        </a:rPr>
+                        <a:t>v3.3.1</a:t>
+                      </a:r>
+                    </a:p>
+                  </a:txBody>
+                  <a:tcPr>
+                    <a:solidFill>
+                      <a:srgbClr val="F2F2F2"/>
+                    </a:solidFill>
+                  </a:tcPr>
+                </a:tc>
+                <a:tc>
+                  <a:txBody>
+                    <a:bodyPr/>
+                    <a:lstStyle/>
+                    <a:p>
+                      <a:pPr algn="ctr"/>
+                      <a:r>
+                        <a:rPr sz="1200">
+                          <a:solidFill>
+                            <a:srgbClr val="333333"/>
+                          </a:solidFill>
+                        </a:rPr>
+                        <a:t>Phase-1 audit r2</a:t>
+                      </a:r>
+                    </a:p>
+                  </a:txBody>
+                  <a:tcPr>
+                    <a:solidFill>
+                      <a:srgbClr val="F2F2F2"/>
+                    </a:solidFill>
+                  </a:tcPr>
+                </a:tc>
+                <a:tc>
+                  <a:txBody>
+                    <a:bodyPr/>
+                    <a:lstStyle/>
+                    <a:p>
+                      <a:pPr algn="ctr"/>
+                      <a:r>
+                        <a:rPr sz="1200">
+                          <a:solidFill>
+                            <a:srgbClr val="333333"/>
+                          </a:solidFill>
+                        </a:rPr>
+                        <a:t>Per-km cycle cap; typology mode-share; subsidy 0.5→0.6; social prune 17→11</a:t>
+                      </a:r>
+                    </a:p>
+                  </a:txBody>
+                  <a:tcPr>
+                    <a:solidFill>
+                      <a:srgbClr val="F2F2F2"/>
+                    </a:solidFill>
+                  </a:tcPr>
+                </a:tc>
+              </a:tr>
+              <a:tr h="411480">
+                <a:tc>
+                  <a:txBody>
+                    <a:bodyPr/>
+                    <a:lstStyle/>
+                    <a:p>
+                      <a:pPr algn="l"/>
+                      <a:r>
+                        <a:rPr sz="1200">
+                          <a:solidFill>
+                            <a:srgbClr val="333333"/>
+                          </a:solidFill>
+                        </a:rPr>
+                        <a:t>v3.3.2</a:t>
+                      </a:r>
+                    </a:p>
+                  </a:txBody>
+                  <a:tcPr>
+                    <a:solidFill>
+                      <a:srgbClr val="FFFFFF"/>
+                    </a:solidFill>
+                  </a:tcPr>
+                </a:tc>
+                <a:tc>
+                  <a:txBody>
+                    <a:bodyPr/>
+                    <a:lstStyle/>
+                    <a:p>
+                      <a:pPr algn="ctr"/>
+                      <a:r>
+                        <a:rPr sz="1200">
+                          <a:solidFill>
+                            <a:srgbClr val="333333"/>
+                          </a:solidFill>
+                        </a:rPr>
+                        <a:t>Demand calibration</a:t>
+                      </a:r>
+                    </a:p>
+                  </a:txBody>
+                  <a:tcPr>
+                    <a:solidFill>
+                      <a:srgbClr val="FFFFFF"/>
+                    </a:solidFill>
+                  </a:tcPr>
+                </a:tc>
+                <a:tc>
+                  <a:txBody>
+                    <a:bodyPr/>
+                    <a:lstStyle/>
+                    <a:p>
+                      <a:pPr algn="ctr"/>
+                      <a:r>
+                        <a:rPr sz="1200">
+                          <a:solidFill>
+                            <a:srgbClr val="333333"/>
+                          </a:solidFill>
+                        </a:rPr>
+                        <a:t>Phase-4 demand rewrite + capture-scale; portable RASTER_PATH</a:t>
+                      </a:r>
+                    </a:p>
+                  </a:txBody>
+                  <a:tcPr>
+                    <a:solidFill>
+                      <a:srgbClr val="FFFFFF"/>
+                    </a:solidFill>
+                  </a:tcPr>
+                </a:tc>
+              </a:tr>
+              <a:tr h="411480">
+                <a:tc>
+                  <a:txBody>
+                    <a:bodyPr/>
+                    <a:lstStyle/>
+                    <a:p>
+                      <a:pPr algn="l"/>
+                      <a:r>
+                        <a:rPr sz="1200">
+                          <a:solidFill>
+                            <a:srgbClr val="333333"/>
+                          </a:solidFill>
+                        </a:rPr>
+                        <a:t>v3.3.3</a:t>
+                      </a:r>
+                    </a:p>
+                  </a:txBody>
+                  <a:tcPr>
+                    <a:solidFill>
+                      <a:srgbClr val="F2F2F2"/>
+                    </a:solidFill>
+                  </a:tcPr>
+                </a:tc>
+                <a:tc>
+                  <a:txBody>
+                    <a:bodyPr/>
+                    <a:lstStyle/>
+                    <a:p>
+                      <a:pPr algn="ctr"/>
+                      <a:r>
+                        <a:rPr sz="1200">
+                          <a:solidFill>
+                            <a:srgbClr val="333333"/>
+                          </a:solidFill>
+                        </a:rPr>
+                        <a:t>Teammate review</a:t>
+                      </a:r>
+                    </a:p>
+                  </a:txBody>
+                  <a:tcPr>
+                    <a:solidFill>
+                      <a:srgbClr val="F2F2F2"/>
+                    </a:solidFill>
+                  </a:tcPr>
+                </a:tc>
+                <a:tc>
+                  <a:txBody>
+                    <a:bodyPr/>
+                    <a:lstStyle/>
+                    <a:p>
+                      <a:pPr algn="ctr"/>
+                      <a:r>
+                        <a:rPr sz="1200">
+                          <a:solidFill>
+                            <a:srgbClr val="333333"/>
+                          </a:solidFill>
+                        </a:rPr>
+                        <a:t>Tourist tagging (4→69 routes); catchment ×1.3; Daily_Capacity formula fix</a:t>
+                      </a:r>
+                    </a:p>
+                  </a:txBody>
+                  <a:tcPr>
+                    <a:solidFill>
+                      <a:srgbClr val="F2F2F2"/>
+                    </a:solidFill>
+                  </a:tcPr>
+                </a:tc>
+              </a:tr>
+              <a:tr h="411480">
+                <a:tc>
+                  <a:txBody>
+                    <a:bodyPr/>
+                    <a:lstStyle/>
+                    <a:p>
+                      <a:pPr algn="l"/>
+                      <a:r>
+                        <a:rPr sz="1200">
+                          <a:solidFill>
+                            <a:srgbClr val="333333"/>
+                          </a:solidFill>
+                        </a:rPr>
+                        <a:t>v3.3.4</a:t>
+                      </a:r>
+                    </a:p>
+                  </a:txBody>
+                  <a:tcPr>
+                    <a:solidFill>
+                      <a:srgbClr val="FFFFFF"/>
+                    </a:solidFill>
+                  </a:tcPr>
+                </a:tc>
+                <a:tc>
+                  <a:txBody>
+                    <a:bodyPr/>
+                    <a:lstStyle/>
+                    <a:p>
+                      <a:pPr algn="ctr"/>
+                      <a:r>
+                        <a:rPr sz="1200">
+                          <a:solidFill>
+                            <a:srgbClr val="333333"/>
+                          </a:solidFill>
+                        </a:rPr>
+                        <a:t>Honest fleet sizing</a:t>
+                      </a:r>
+                    </a:p>
+                  </a:txBody>
+                  <a:tcPr>
+                    <a:solidFill>
+                      <a:srgbClr val="FFFFFF"/>
+                    </a:solidFill>
+                  </a:tcPr>
+                </a:tc>
+                <a:tc>
+                  <a:txBody>
+                    <a:bodyPr/>
+                    <a:lstStyle/>
+                    <a:p>
+                      <a:pPr algn="ctr"/>
+                      <a:r>
+                        <a:rPr sz="1200">
+                          <a:solidFill>
+                            <a:srgbClr val="333333"/>
+                          </a:solidFill>
+                        </a:rPr>
+                        <a:t>SSCL empirical → floor not override; LPV restored to dashboard; Red_Overload → 0</a:t>
+                      </a:r>
+                    </a:p>
+                  </a:txBody>
+                  <a:tcPr>
+                    <a:solidFill>
+                      <a:srgbClr val="FFFFFF"/>
+                    </a:solidFill>
+                  </a:tcPr>
+                </a:tc>
+              </a:tr>
+              <a:tr h="411480">
+                <a:tc>
+                  <a:txBody>
+                    <a:bodyPr/>
+                    <a:lstStyle/>
+                    <a:p>
+                      <a:pPr algn="l"/>
+                      <a:r>
+                        <a:rPr sz="1200">
+                          <a:solidFill>
+                            <a:srgbClr val="333333"/>
+                          </a:solidFill>
+                        </a:rPr>
+                        <a:t>v3.3.5</a:t>
+                      </a:r>
+                    </a:p>
+                  </a:txBody>
+                  <a:tcPr>
+                    <a:solidFill>
+                      <a:srgbClr val="F2F2F2"/>
+                    </a:solidFill>
+                  </a:tcPr>
+                </a:tc>
+                <a:tc>
+                  <a:txBody>
+                    <a:bodyPr/>
+                    <a:lstStyle/>
+                    <a:p>
+                      <a:pPr algn="ctr"/>
+                      <a:r>
+                        <a:rPr sz="1200">
+                          <a:solidFill>
+                            <a:srgbClr val="333333"/>
+                          </a:solidFill>
+                        </a:rPr>
+                        <a:t>Conservative phase-1</a:t>
+                      </a:r>
+                    </a:p>
+                  </a:txBody>
+                  <a:tcPr>
+                    <a:solidFill>
+                      <a:srgbClr val="F2F2F2"/>
+                    </a:solidFill>
+                  </a:tcPr>
+                </a:tc>
+                <a:tc>
+                  <a:txBody>
+                    <a:bodyPr/>
+                    <a:lstStyle/>
+                    <a:p>
+                      <a:pPr algn="ctr"/>
+                      <a:r>
+                        <a:rPr sz="1200">
+                          <a:solidFill>
+                            <a:srgbClr val="333333"/>
+                          </a:solidFill>
+                        </a:rPr>
+                        <a:t>Non-SSCL HP 15→20 min; MP 30→35 min; fleet 1,113→988 (0.60/1000)</a:t>
+                      </a:r>
+                    </a:p>
+                  </a:txBody>
+                  <a:tcPr>
+                    <a:solidFill>
+                      <a:srgbClr val="F2F2F2"/>
+                    </a:solidFill>
+                  </a:tcPr>
+                </a:tc>
+              </a:tr>
+              <a:tr h="411480">
+                <a:tc>
+                  <a:txBody>
+                    <a:bodyPr/>
+                    <a:lstStyle/>
+                    <a:p>
+                      <a:pPr algn="l"/>
+                      <a:r>
+                        <a:rPr sz="1200">
+                          <a:solidFill>
+                            <a:srgbClr val="333333"/>
+                          </a:solidFill>
+                        </a:rPr>
+                        <a:t>v3.3.6</a:t>
+                      </a:r>
+                    </a:p>
+                  </a:txBody>
+                  <a:tcPr>
+                    <a:solidFill>
+                      <a:srgbClr val="FFFFFF"/>
+                    </a:solidFill>
+                  </a:tcPr>
+                </a:tc>
+                <a:tc>
+                  <a:txBody>
+                    <a:bodyPr/>
+                    <a:lstStyle/>
+                    <a:p>
+                      <a:pPr algn="ctr"/>
+                      <a:r>
+                        <a:rPr sz="1200">
+                          <a:solidFill>
+                            <a:srgbClr val="333333"/>
+                          </a:solidFill>
+                        </a:rPr>
+                        <a:t>RTO workbook + dev gate</a:t>
+                      </a:r>
+                    </a:p>
+                  </a:txBody>
+                  <a:tcPr>
+                    <a:solidFill>
+                      <a:srgbClr val="FFFFFF"/>
+                    </a:solidFill>
+                  </a:tcPr>
+                </a:tc>
+                <a:tc>
+                  <a:txBody>
+                    <a:bodyPr/>
+                    <a:lstStyle/>
+                    <a:p>
+                      <a:pPr algn="ctr"/>
+                      <a:r>
+                        <a:rPr sz="1200">
+                          <a:solidFill>
+                            <a:srgbClr val="333333"/>
+                          </a:solidFill>
+                        </a:rPr>
+                        <a:t>9-sheet RTO export with sign-off; dummy-pop fallback gated behind env var</a:t>
+                      </a:r>
+                    </a:p>
+                  </a:txBody>
+                  <a:tcPr>
+                    <a:solidFill>
+                      <a:srgbClr val="FFFFFF"/>
+                    </a:solidFill>
+                  </a:tcPr>
+                </a:tc>
+              </a:tr>
+            </a:tbl>
+          </a:graphicData>
+        </a:graphic>
+      </p:graphicFrame>
+      <p:sp>
+        <p:nvSpPr>
+          <p:cNvPr id="4" name="TextBox 3"/>
+          <p:cNvSpPr txBox="1"/>
+          <p:nvPr/>
+        </p:nvSpPr>
+        <p:spPr>
+          <a:xfrm>
+            <a:off x="365760" y="6400800"/>
+            <a:ext cx="11430000" cy="274320"/>
+          </a:xfrm>
+          <a:prstGeom prst="rect">
+            <a:avLst/>
+          </a:prstGeom>
+          <a:noFill/>
+        </p:spPr>
+        <p:txBody>
+          <a:bodyPr wrap="none">
+            <a:spAutoFit/>
+          </a:bodyPr>
+          <a:lstStyle/>
+          <a:p>
+            <a:pPr algn="l"/>
+            <a:r>
+              <a:rPr sz="1000" i="1">
+                <a:solidFill>
+                  <a:srgbClr val="333333"/>
+                </a:solidFill>
+              </a:rPr>
+              <a:t>Slide 8  •  Audit trail</a:t>
+            </a:r>
+          </a:p>
+        </p:txBody>
+      </p:sp>
+    </p:spTree>
+  </p:cSld>
+  <p:clrMapOvr>
+    <a:masterClrMapping/>
+  </p:clrMapOvr>
+</p:sld>
+</file>
+
+<file path=ppt/slides/slide9.xml><?xml version="1.0" encoding="utf-8"?>
+<p:sld xmlns:a="http://schemas.openxmlformats.org/drawingml/2006/main" xmlns:p="http://schemas.openxmlformats.org/presentationml/2006/main" xmlns:r="http://schemas.openxmlformats.org/officeDocument/2006/relationships">
+  <p:cSld>
+    <p:spTree>
+      <p:nvGrpSpPr>
+        <p:cNvPr id="1" name=""/>
+        <p:cNvGrpSpPr/>
+        <p:nvPr/>
+      </p:nvGrpSpPr>
+      <p:grpSpPr/>
+      <p:sp>
+        <p:nvSpPr>
+          <p:cNvPr id="2" name="Rectangle 1"/>
+          <p:cNvSpPr/>
+          <p:nvPr/>
+        </p:nvSpPr>
+        <p:spPr>
+          <a:xfrm>
+            <a:off x="0" y="0"/>
+            <a:ext cx="12191695" cy="822960"/>
+          </a:xfrm>
+          <a:prstGeom prst="rect">
+            <a:avLst/>
+          </a:prstGeom>
+          <a:solidFill>
+            <a:srgbClr val="00695C"/>
+          </a:solidFill>
+          <a:ln>
+            <a:noFill/>
+          </a:ln>
+        </p:spPr>
+        <p:style>
+          <a:lnRef idx="1">
+            <a:schemeClr val="accent1"/>
+          </a:lnRef>
+          <a:fillRef idx="3">
+            <a:schemeClr val="accent1"/>
+          </a:fillRef>
+          <a:effectRef idx="2">
+            <a:schemeClr val="accent1"/>
+          </a:effectRef>
+          <a:fontRef idx="minor">
+            <a:schemeClr val="lt1"/>
+          </a:fontRef>
+        </p:style>
+        <p:txBody>
+          <a:bodyPr rtlCol="0" anchor="ctr" lIns="365760" tIns="164592"/>
+          <a:lstStyle/>
+          <a:p>
+            <a:pPr algn="l"/>
+            <a:r>
+              <a:rPr sz="2800" b="1">
+                <a:solidFill>
+                  <a:srgbClr val="FFFFFF"/>
+                </a:solidFill>
+              </a:rPr>
+              <a:t>Headway plan — conservative vs aspirational</a:t>
             </a:r>
           </a:p>
         </p:txBody>
@@ -6142,9 +7184,10 @@
                 <a:tableStyleId>{5C22544A-7EE6-4342-B048-85BDC9FD1C3A}</a:tableStyleId>
               </a:tblPr>
               <a:tblGrid>
-                <a:gridCol w="3657600"/>
-                <a:gridCol w="3657600"/>
-                <a:gridCol w="3657600"/>
+                <a:gridCol w="2743200"/>
+                <a:gridCol w="2743200"/>
+                <a:gridCol w="2743200"/>
+                <a:gridCol w="2743200"/>
               </a:tblGrid>
               <a:tr h="411480">
                 <a:tc>
@@ -6159,7 +7202,7 @@
                             <a:srgbClr val="FFFFFF"/>
                           </a:solidFill>
                         </a:rPr>
-                        <a:t>Version</a:t>
+                        <a:t>Band</a:t>
                       </a:r>
                     </a:p>
                   </a:txBody>
@@ -6181,7 +7224,7 @@
                             <a:srgbClr val="FFFFFF"/>
                           </a:solidFill>
                         </a:rPr>
-                        <a:t>Theme</a:t>
+                        <a:t>v3.3.4 aspirational</a:t>
                       </a:r>
                     </a:p>
                   </a:txBody>
@@ -6203,7 +7246,29 @@
                             <a:srgbClr val="FFFFFF"/>
                           </a:solidFill>
                         </a:rPr>
-                        <a:t>Key fixes</a:t>
+                        <a:t>v3.3.5 phase-1 (current)</a:t>
+                      </a:r>
+                    </a:p>
+                  </a:txBody>
+                  <a:tcPr>
+                    <a:solidFill>
+                      <a:srgbClr val="1A237E"/>
+                    </a:solidFill>
+                  </a:tcPr>
+                </a:tc>
+                <a:tc>
+                  <a:txBody>
+                    <a:bodyPr/>
+                    <a:lstStyle/>
+                    <a:p>
+                      <a:pPr algn="ctr"/>
+                      <a:r>
+                        <a:rPr sz="1400" b="1">
+                          <a:solidFill>
+                            <a:srgbClr val="FFFFFF"/>
+                          </a:solidFill>
+                        </a:rPr>
+                        <a:t># routes</a:t>
                       </a:r>
                     </a:p>
                   </a:txBody>
@@ -6227,7 +7292,7 @@
                             <a:srgbClr val="333333"/>
                           </a:solidFill>
                         </a:rPr>
-                        <a:t>v3.1</a:t>
+                        <a:t>SSCL backbone</a:t>
                       </a:r>
                     </a:p>
                   </a:txBody>
@@ -6249,7 +7314,7 @@
                             <a:srgbClr val="333333"/>
                           </a:solidFill>
                         </a:rPr>
-                        <a:t>Initial Kashmir fork</a:t>
+                        <a:t>15 min</a:t>
                       </a:r>
                     </a:p>
                   </a:txBody>
@@ -6271,7 +7336,29 @@
                             <a:srgbClr val="333333"/>
                           </a:solidFill>
                         </a:rPr>
-                        <a:t>Replaced 13 RITES Jammu CMP routes with 30 SSCL CHALO routes</a:t>
+                        <a:t>15 min (unchanged)</a:t>
+                      </a:r>
+                    </a:p>
+                  </a:txBody>
+                  <a:tcPr>
+                    <a:solidFill>
+                      <a:srgbClr val="FFFFFF"/>
+                    </a:solidFill>
+                  </a:tcPr>
+                </a:tc>
+                <a:tc>
+                  <a:txBody>
+                    <a:bodyPr/>
+                    <a:lstStyle/>
+                    <a:p>
+                      <a:pPr algn="ctr"/>
+                      <a:r>
+                        <a:rPr sz="1200">
+                          <a:solidFill>
+                            <a:srgbClr val="333333"/>
+                          </a:solidFill>
+                        </a:rPr>
+                        <a:t>45</a:t>
                       </a:r>
                     </a:p>
                   </a:txBody>
@@ -6295,7 +7382,7 @@
                             <a:srgbClr val="333333"/>
                           </a:solidFill>
                         </a:rPr>
-                        <a:t>v3.2</a:t>
+                        <a:t>Non-SSCL trunk (HP)</a:t>
                       </a:r>
                     </a:p>
                   </a:txBody>
@@ -6317,7 +7404,7 @@
                             <a:srgbClr val="333333"/>
                           </a:solidFill>
                         </a:rPr>
-                        <a:t>Audit response</a:t>
+                        <a:t>15 min</a:t>
                       </a:r>
                     </a:p>
                   </a:txBody>
@@ -6339,7 +7426,29 @@
                             <a:srgbClr val="333333"/>
                           </a:solidFill>
                         </a:rPr>
-                        <a:t>RASTER_PATH bug; SSCL headway 45→15; Jhelum bridge bottleneck; CONGESTION_CITY_CORE 1.4→2.2; Tier-3 POI split</a:t>
+                        <a:t>20 min</a:t>
+                      </a:r>
+                    </a:p>
+                  </a:txBody>
+                  <a:tcPr>
+                    <a:solidFill>
+                      <a:srgbClr val="F2F2F2"/>
+                    </a:solidFill>
+                  </a:tcPr>
+                </a:tc>
+                <a:tc>
+                  <a:txBody>
+                    <a:bodyPr/>
+                    <a:lstStyle/>
+                    <a:p>
+                      <a:pPr algn="ctr"/>
+                      <a:r>
+                        <a:rPr sz="1200">
+                          <a:solidFill>
+                            <a:srgbClr val="333333"/>
+                          </a:solidFill>
+                        </a:rPr>
+                        <a:t>~85</a:t>
                       </a:r>
                     </a:p>
                   </a:txBody>
@@ -6363,7 +7472,7 @@
                             <a:srgbClr val="333333"/>
                           </a:solidFill>
                         </a:rPr>
-                        <a:t>v3.3</a:t>
+                        <a:t>MP feeders</a:t>
                       </a:r>
                     </a:p>
                   </a:txBody>
@@ -6385,7 +7494,7 @@
                             <a:srgbClr val="333333"/>
                           </a:solidFill>
                         </a:rPr>
-                        <a:t>Phase-1 audit r1</a:t>
+                        <a:t>30 min</a:t>
                       </a:r>
                     </a:p>
                   </a:txBody>
@@ -6407,7 +7516,29 @@
                             <a:srgbClr val="333333"/>
                           </a:solidFill>
                         </a:rPr>
-                        <a:t>Typology flags; spare ratio 1.15; Phase-4 KPIs (Load, Viability, Emissions, Equity); SSCL_CDI_Conflict flag</a:t>
+                        <a:t>35 min</a:t>
+                      </a:r>
+                    </a:p>
+                  </a:txBody>
+                  <a:tcPr>
+                    <a:solidFill>
+                      <a:srgbClr val="FFFFFF"/>
+                    </a:solidFill>
+                  </a:tcPr>
+                </a:tc>
+                <a:tc>
+                  <a:txBody>
+                    <a:bodyPr/>
+                    <a:lstStyle/>
+                    <a:p>
+                      <a:pPr algn="ctr"/>
+                      <a:r>
+                        <a:rPr sz="1200">
+                          <a:solidFill>
+                            <a:srgbClr val="333333"/>
+                          </a:solidFill>
+                        </a:rPr>
+                        <a:t>~50</a:t>
                       </a:r>
                     </a:p>
                   </a:txBody>
@@ -6431,7 +7562,7 @@
                             <a:srgbClr val="333333"/>
                           </a:solidFill>
                         </a:rPr>
-                        <a:t>v3.3.1</a:t>
+                        <a:t>LP lifelines</a:t>
                       </a:r>
                     </a:p>
                   </a:txBody>
@@ -6453,7 +7584,7 @@
                             <a:srgbClr val="333333"/>
                           </a:solidFill>
                         </a:rPr>
-                        <a:t>Phase-1 audit r2</a:t>
+                        <a:t>60 min</a:t>
                       </a:r>
                     </a:p>
                   </a:txBody>
@@ -6475,7 +7606,29 @@
                             <a:srgbClr val="333333"/>
                           </a:solidFill>
                         </a:rPr>
-                        <a:t>Per-km cycle-time cap; typology mode-share; subsidy threshold 0.5→0.6; social obligation prune 17→11; CDI conflict +0.2 delta</a:t>
+                        <a:t>60 min (unchanged)</a:t>
+                      </a:r>
+                    </a:p>
+                  </a:txBody>
+                  <a:tcPr>
+                    <a:solidFill>
+                      <a:srgbClr val="F2F2F2"/>
+                    </a:solidFill>
+                  </a:tcPr>
+                </a:tc>
+                <a:tc>
+                  <a:txBody>
+                    <a:bodyPr/>
+                    <a:lstStyle/>
+                    <a:p>
+                      <a:pPr algn="ctr"/>
+                      <a:r>
+                        <a:rPr sz="1200">
+                          <a:solidFill>
+                            <a:srgbClr val="333333"/>
+                          </a:solidFill>
+                        </a:rPr>
+                        <a:t>23</a:t>
                       </a:r>
                     </a:p>
                   </a:txBody>
@@ -6499,7 +7652,7 @@
                             <a:srgbClr val="333333"/>
                           </a:solidFill>
                         </a:rPr>
-                        <a:t>v3.3.2</a:t>
+                        <a:t>Social-promoted</a:t>
                       </a:r>
                     </a:p>
                   </a:txBody>
@@ -6521,7 +7674,7 @@
                             <a:srgbClr val="333333"/>
                           </a:solidFill>
                         </a:rPr>
-                        <a:t>Demand calibration</a:t>
+                        <a:t>45 min</a:t>
                       </a:r>
                     </a:p>
                   </a:txBody>
@@ -6543,7 +7696,29 @@
                             <a:srgbClr val="333333"/>
                           </a:solidFill>
                         </a:rPr>
-                        <a:t>Phase-4 demand rewrite (corridor-share + capture-scale); portable RASTER_PATH; cross_evaluate operator-absorption aware</a:t>
+                        <a:t>45 min (unchanged)</a:t>
+                      </a:r>
+                    </a:p>
+                  </a:txBody>
+                  <a:tcPr>
+                    <a:solidFill>
+                      <a:srgbClr val="FFFFFF"/>
+                    </a:solidFill>
+                  </a:tcPr>
+                </a:tc>
+                <a:tc>
+                  <a:txBody>
+                    <a:bodyPr/>
+                    <a:lstStyle/>
+                    <a:p>
+                      <a:pPr algn="ctr"/>
+                      <a:r>
+                        <a:rPr sz="1200">
+                          <a:solidFill>
+                            <a:srgbClr val="333333"/>
+                          </a:solidFill>
+                        </a:rPr>
+                        <a:t>~4</a:t>
                       </a:r>
                     </a:p>
                   </a:txBody>
@@ -6561,6 +7736,74 @@
       <p:sp>
         <p:nvSpPr>
           <p:cNvPr id="4" name="TextBox 3"/>
+          <p:cNvSpPr txBox="1"/>
+          <p:nvPr/>
+        </p:nvSpPr>
+        <p:spPr>
+          <a:xfrm>
+            <a:off x="548640" y="3840480"/>
+            <a:ext cx="10972800" cy="5029200"/>
+          </a:xfrm>
+          <a:prstGeom prst="rect">
+            <a:avLst/>
+          </a:prstGeom>
+          <a:noFill/>
+        </p:spPr>
+        <p:txBody>
+          <a:bodyPr wrap="square">
+            <a:spAutoFit/>
+          </a:bodyPr>
+          <a:lstStyle/>
+          <a:p>
+            <a:pPr algn="l">
+              <a:spcAft>
+                <a:spcPts val="800"/>
+              </a:spcAft>
+            </a:pPr>
+            <a:r>
+              <a:rPr sz="1400">
+                <a:solidFill>
+                  <a:srgbClr val="333333"/>
+                </a:solidFill>
+              </a:rPr>
+              <a:t>v3.3.4 (15-min on all 130 HP routes) was a 1,113-bus plan = +85% over current ~600 buses on the road.</a:t>
+            </a:r>
+          </a:p>
+          <a:p>
+            <a:pPr algn="l">
+              <a:spcAft>
+                <a:spcPts val="800"/>
+              </a:spcAft>
+            </a:pPr>
+            <a:r>
+              <a:rPr sz="1400">
+                <a:solidFill>
+                  <a:srgbClr val="333333"/>
+                </a:solidFill>
+              </a:rPr>
+              <a:t>v3.3.5 (20-min on non-SSCL HP) is a 988-bus plan = +65% over current. Same active-route count; ~125 fewer buses to deploy in Year-1.</a:t>
+            </a:r>
+          </a:p>
+          <a:p>
+            <a:pPr algn="l">
+              <a:spcAft>
+                <a:spcPts val="800"/>
+              </a:spcAft>
+            </a:pPr>
+            <a:r>
+              <a:rPr sz="1400">
+                <a:solidFill>
+                  <a:srgbClr val="333333"/>
+                </a:solidFill>
+              </a:rPr>
+              <a:t>Both plans pass the same 8/8 QC checks; both are within ±25% of the headway-scaled CHALO calibration target on per-route fleet.</a:t>
+            </a:r>
+          </a:p>
+        </p:txBody>
+      </p:sp>
+      <p:sp>
+        <p:nvSpPr>
+          <p:cNvPr id="5" name="TextBox 4"/>
           <p:cNvSpPr txBox="1"/>
           <p:nvPr/>
         </p:nvSpPr>
@@ -6587,238 +7830,7 @@
                   <a:srgbClr val="333333"/>
                 </a:solidFill>
               </a:rPr>
-              <a:t>Slide 8  •  Audit trail</a:t>
-            </a:r>
-          </a:p>
-        </p:txBody>
-      </p:sp>
-    </p:spTree>
-  </p:cSld>
-  <p:clrMapOvr>
-    <a:masterClrMapping/>
-  </p:clrMapOvr>
-</p:sld>
-</file>
-
-<file path=ppt/slides/slide9.xml><?xml version="1.0" encoding="utf-8"?>
-<p:sld xmlns:a="http://schemas.openxmlformats.org/drawingml/2006/main" xmlns:p="http://schemas.openxmlformats.org/presentationml/2006/main" xmlns:r="http://schemas.openxmlformats.org/officeDocument/2006/relationships">
-  <p:cSld>
-    <p:spTree>
-      <p:nvGrpSpPr>
-        <p:cNvPr id="1" name=""/>
-        <p:cNvGrpSpPr/>
-        <p:nvPr/>
-      </p:nvGrpSpPr>
-      <p:grpSpPr/>
-      <p:sp>
-        <p:nvSpPr>
-          <p:cNvPr id="2" name="Rectangle 1"/>
-          <p:cNvSpPr/>
-          <p:nvPr/>
-        </p:nvSpPr>
-        <p:spPr>
-          <a:xfrm>
-            <a:off x="0" y="0"/>
-            <a:ext cx="12191695" cy="822960"/>
-          </a:xfrm>
-          <a:prstGeom prst="rect">
-            <a:avLst/>
-          </a:prstGeom>
-          <a:solidFill>
-            <a:srgbClr val="D32F2F"/>
-          </a:solidFill>
-          <a:ln>
-            <a:noFill/>
-          </a:ln>
-        </p:spPr>
-        <p:style>
-          <a:lnRef idx="1">
-            <a:schemeClr val="accent1"/>
-          </a:lnRef>
-          <a:fillRef idx="3">
-            <a:schemeClr val="accent1"/>
-          </a:fillRef>
-          <a:effectRef idx="2">
-            <a:schemeClr val="accent1"/>
-          </a:effectRef>
-          <a:fontRef idx="minor">
-            <a:schemeClr val="lt1"/>
-          </a:fontRef>
-        </p:style>
-        <p:txBody>
-          <a:bodyPr rtlCol="0" anchor="ctr" lIns="365760" tIns="164592"/>
-          <a:lstStyle/>
-          <a:p>
-            <a:pPr algn="l"/>
-            <a:r>
-              <a:rPr sz="2800" b="1">
-                <a:solidFill>
-                  <a:srgbClr val="FFFFFF"/>
-                </a:solidFill>
-              </a:rPr>
-              <a:t>Known limitations (carry-over to v4)</a:t>
-            </a:r>
-          </a:p>
-        </p:txBody>
-      </p:sp>
-      <p:sp>
-        <p:nvSpPr>
-          <p:cNvPr id="3" name="TextBox 2"/>
-          <p:cNvSpPr txBox="1"/>
-          <p:nvPr/>
-        </p:nvSpPr>
-        <p:spPr>
-          <a:xfrm>
-            <a:off x="548640" y="1097280"/>
-            <a:ext cx="10972800" cy="5029200"/>
-          </a:xfrm>
-          <a:prstGeom prst="rect">
-            <a:avLst/>
-          </a:prstGeom>
-          <a:noFill/>
-        </p:spPr>
-        <p:txBody>
-          <a:bodyPr wrap="square">
-            <a:spAutoFit/>
-          </a:bodyPr>
-          <a:lstStyle/>
-          <a:p>
-            <a:pPr algn="l">
-              <a:spcAft>
-                <a:spcPts val="800"/>
-              </a:spcAft>
-            </a:pPr>
-            <a:r>
-              <a:rPr sz="1800">
-                <a:solidFill>
-                  <a:srgbClr val="333333"/>
-                </a:solidFill>
-              </a:rPr>
-              <a:t>1. Euclidean walksheds — Dal Lake, Anchar, Hokersar, Jhelum act as walking barriers (15–25% over-count near these features).</a:t>
-            </a:r>
-          </a:p>
-          <a:p>
-            <a:pPr algn="l">
-              <a:spcAft>
-                <a:spcPts val="800"/>
-              </a:spcAft>
-            </a:pPr>
-            <a:r>
-              <a:rPr sz="1800">
-                <a:solidFill>
-                  <a:srgbClr val="333333"/>
-                </a:solidFill>
-              </a:rPr>
-              <a:t>2. Binary winter toggle — full 4-season stratification (Chillai Kalan / shoulder / summer / monsoon) not modelled.</a:t>
-            </a:r>
-          </a:p>
-          <a:p>
-            <a:pPr algn="l">
-              <a:spcAft>
-                <a:spcPts val="800"/>
-              </a:spcAft>
-            </a:pPr>
-            <a:r>
-              <a:rPr sz="1800">
-                <a:solidFill>
-                  <a:srgbClr val="333333"/>
-                </a:solidFill>
-              </a:rPr>
-              <a:t>3. Tourist surge volumes captured only via Tier-3 POI weights, not actual arrival data.</a:t>
-            </a:r>
-          </a:p>
-          <a:p>
-            <a:pPr algn="l">
-              <a:spcAft>
-                <a:spcPts val="800"/>
-              </a:spcAft>
-            </a:pPr>
-            <a:r>
-              <a:rPr sz="1800">
-                <a:solidFill>
-                  <a:srgbClr val="333333"/>
-                </a:solidFill>
-              </a:rPr>
-              <a:t>4. Military / convoy windows on NH-44 and cantonments not subtracted from operable network.</a:t>
-            </a:r>
-          </a:p>
-          <a:p>
-            <a:pPr algn="l">
-              <a:spcAft>
-                <a:spcPts val="800"/>
-              </a:spcAft>
-            </a:pPr>
-            <a:r>
-              <a:rPr sz="1800">
-                <a:solidFill>
-                  <a:srgbClr val="333333"/>
-                </a:solidFill>
-              </a:rPr>
-              <a:t>5. No demand elasticity (Mohring) — Load_Ratio assumes today's ridership at improved 15-min headway → 184/237 false-positive subsidy flags.</a:t>
-            </a:r>
-          </a:p>
-          <a:p>
-            <a:pPr algn="l">
-              <a:spcAft>
-                <a:spcPts val="800"/>
-              </a:spcAft>
-            </a:pPr>
-            <a:r>
-              <a:rPr sz="1800">
-                <a:solidFill>
-                  <a:srgbClr val="333333"/>
-                </a:solidFill>
-              </a:rPr>
-              <a:t>6. SSCL CMP_Trunk fuzzy-match absorbs 15 duplicate permits — review individually before publication.</a:t>
-            </a:r>
-          </a:p>
-          <a:p>
-            <a:pPr algn="l">
-              <a:spcAft>
-                <a:spcPts val="800"/>
-              </a:spcAft>
-            </a:pPr>
-            <a:r>
-              <a:rPr sz="1800">
-                <a:solidFill>
-                  <a:srgbClr val="333333"/>
-                </a:solidFill>
-              </a:rPr>
-              <a:t>7. Per-route AFC validation still manual; cross_evaluate covers system-level only.</a:t>
-            </a:r>
-          </a:p>
-        </p:txBody>
-      </p:sp>
-      <p:sp>
-        <p:nvSpPr>
-          <p:cNvPr id="4" name="TextBox 3"/>
-          <p:cNvSpPr txBox="1"/>
-          <p:nvPr/>
-        </p:nvSpPr>
-        <p:spPr>
-          <a:xfrm>
-            <a:off x="365760" y="6400800"/>
-            <a:ext cx="11430000" cy="274320"/>
-          </a:xfrm>
-          <a:prstGeom prst="rect">
-            <a:avLst/>
-          </a:prstGeom>
-          <a:noFill/>
-        </p:spPr>
-        <p:txBody>
-          <a:bodyPr wrap="none">
-            <a:spAutoFit/>
-          </a:bodyPr>
-          <a:lstStyle/>
-          <a:p>
-            <a:pPr algn="l"/>
-            <a:r>
-              <a:rPr sz="1000" i="1">
-                <a:solidFill>
-                  <a:srgbClr val="333333"/>
-                </a:solidFill>
-              </a:rPr>
-              <a:t>Slide 9  •  Limitations / v4 backlog</a:t>
+              <a:t>Slide 8b  •  Phase-1 vs phase-2 ambitions</a:t>
             </a:r>
           </a:p>
         </p:txBody>

--- a/Kashmir_Transit_Technical_Briefing.pptx
+++ b/Kashmir_Transit_Technical_Briefing.pptx
@@ -3634,7 +3634,7 @@
                   <a:srgbClr val="333333"/>
                 </a:solidFill>
               </a:rPr>
-              <a:t>✓  SSCL Daily_Demand error:    +9.2%   (target ±10%)</a:t>
+              <a:t>✓  SSCL Daily_Demand error:    +8.7%   (target ±10%)</a:t>
             </a:r>
           </a:p>
           <a:p>
@@ -4893,7 +4893,7 @@
                             <a:srgbClr val="333333"/>
                           </a:solidFill>
                         </a:rPr>
-                        <a:t>988</a:t>
+                        <a:t>1003</a:t>
                       </a:r>
                     </a:p>
                   </a:txBody>
@@ -4915,7 +4915,7 @@
                             <a:srgbClr val="333333"/>
                           </a:solidFill>
                         </a:rPr>
-                        <a:t>HPV 138 / MPV 730 / LPV 153</a:t>
+                        <a:t>HPV 84 / MPV 797 / LPV 153</a:t>
                       </a:r>
                     </a:p>
                   </a:txBody>
@@ -5520,7 +5520,7 @@
                             <a:srgbClr val="333333"/>
                           </a:solidFill>
                         </a:rPr>
-                        <a:t>34,796</a:t>
+                        <a:t>34,647</a:t>
                       </a:r>
                     </a:p>
                   </a:txBody>
@@ -5542,7 +5542,7 @@
                             <a:srgbClr val="333333"/>
                           </a:solidFill>
                         </a:rPr>
-                        <a:t>+9.2%  (within ±10%)</a:t>
+                        <a:t>+8.7%  (within ±10%)</a:t>
                       </a:r>
                     </a:p>
                   </a:txBody>
